--- a/slides/2-1_anesthesia_machine/2-1_anesthesia_machine.pptx
+++ b/slides/2-1_anesthesia_machine/2-1_anesthesia_machine.pptx
@@ -2224,7 +2224,7 @@
           <a:ln/>
         </p:spPr>
         <p:txBody>
-          <a:bodyPr wrap="square" lIns="0" tIns="0" rIns="0" bIns="0" rtlCol="0" anchor="ctr"/>
+          <a:bodyPr wrap="none" lIns="0" tIns="0" rIns="0" bIns="0" rtlCol="0" anchor="ctr"/>
           <a:lstStyle/>
           <a:p>
             <a:pPr algn="ctr" indent="0" marL="0">
@@ -2267,7 +2267,7 @@
           <a:ln/>
         </p:spPr>
         <p:txBody>
-          <a:bodyPr wrap="square" lIns="0" tIns="0" rIns="0" bIns="0" rtlCol="0" anchor="ctr"/>
+          <a:bodyPr wrap="none" lIns="0" tIns="0" rIns="0" bIns="0" rtlCol="0" anchor="ctr"/>
           <a:lstStyle/>
           <a:p>
             <a:pPr algn="ctr" indent="0" marL="0">
@@ -2310,7 +2310,7 @@
           <a:ln/>
         </p:spPr>
         <p:txBody>
-          <a:bodyPr wrap="square" lIns="0" tIns="0" rIns="0" bIns="0" rtlCol="0" anchor="ctr"/>
+          <a:bodyPr wrap="none" lIns="0" tIns="0" rIns="0" bIns="0" rtlCol="0" anchor="ctr"/>
           <a:lstStyle/>
           <a:p>
             <a:pPr algn="ctr" indent="0" marL="0">
@@ -2353,7 +2353,7 @@
           <a:ln/>
         </p:spPr>
         <p:txBody>
-          <a:bodyPr wrap="square" lIns="0" tIns="0" rIns="0" bIns="0" rtlCol="0" anchor="ctr"/>
+          <a:bodyPr wrap="none" lIns="0" tIns="0" rIns="0" bIns="0" rtlCol="0" anchor="ctr"/>
           <a:lstStyle/>
           <a:p>
             <a:pPr algn="ctr" indent="0" marL="0">
@@ -2396,7 +2396,7 @@
           <a:ln/>
         </p:spPr>
         <p:txBody>
-          <a:bodyPr wrap="square" lIns="0" tIns="0" rIns="0" bIns="0" rtlCol="0" anchor="ctr"/>
+          <a:bodyPr wrap="none" lIns="0" tIns="0" rIns="0" bIns="0" rtlCol="0" anchor="ctr"/>
           <a:lstStyle/>
           <a:p>
             <a:pPr algn="ctr" indent="0" marL="0">
@@ -3042,7 +3042,7 @@
           <a:ln/>
         </p:spPr>
         <p:txBody>
-          <a:bodyPr wrap="square" lIns="0" tIns="0" rIns="0" bIns="0" rtlCol="0" anchor="ctr"/>
+          <a:bodyPr wrap="none" lIns="0" tIns="0" rIns="0" bIns="0" rtlCol="0" anchor="ctr"/>
           <a:lstStyle/>
           <a:p>
             <a:pPr algn="ctr" indent="0" marL="0">
@@ -3085,7 +3085,7 @@
           <a:ln/>
         </p:spPr>
         <p:txBody>
-          <a:bodyPr wrap="square" lIns="0" tIns="0" rIns="0" bIns="0" rtlCol="0" anchor="ctr"/>
+          <a:bodyPr wrap="none" lIns="0" tIns="0" rIns="0" bIns="0" rtlCol="0" anchor="ctr"/>
           <a:lstStyle/>
           <a:p>
             <a:pPr algn="ctr" indent="0" marL="0">
@@ -3128,7 +3128,7 @@
           <a:ln/>
         </p:spPr>
         <p:txBody>
-          <a:bodyPr wrap="square" lIns="0" tIns="0" rIns="0" bIns="0" rtlCol="0" anchor="ctr"/>
+          <a:bodyPr wrap="none" lIns="0" tIns="0" rIns="0" bIns="0" rtlCol="0" anchor="ctr"/>
           <a:lstStyle/>
           <a:p>
             <a:pPr algn="ctr" indent="0" marL="0">
@@ -3171,7 +3171,7 @@
           <a:ln/>
         </p:spPr>
         <p:txBody>
-          <a:bodyPr wrap="square" lIns="0" tIns="0" rIns="0" bIns="0" rtlCol="0" anchor="ctr"/>
+          <a:bodyPr wrap="none" lIns="0" tIns="0" rIns="0" bIns="0" rtlCol="0" anchor="ctr"/>
           <a:lstStyle/>
           <a:p>
             <a:pPr algn="ctr" indent="0" marL="0">
@@ -3214,7 +3214,7 @@
           <a:ln/>
         </p:spPr>
         <p:txBody>
-          <a:bodyPr wrap="square" lIns="0" tIns="0" rIns="0" bIns="0" rtlCol="0" anchor="ctr"/>
+          <a:bodyPr wrap="none" lIns="0" tIns="0" rIns="0" bIns="0" rtlCol="0" anchor="ctr"/>
           <a:lstStyle/>
           <a:p>
             <a:pPr algn="ctr" indent="0" marL="0">
@@ -4515,7 +4515,7 @@
           <a:ln/>
         </p:spPr>
         <p:txBody>
-          <a:bodyPr wrap="square" lIns="0" tIns="0" rIns="0" bIns="0" rtlCol="0" anchor="ctr"/>
+          <a:bodyPr wrap="none" lIns="0" tIns="0" rIns="0" bIns="0" rtlCol="0" anchor="ctr"/>
           <a:lstStyle/>
           <a:p>
             <a:pPr algn="ctr" indent="0" marL="0">
@@ -4558,7 +4558,7 @@
           <a:ln/>
         </p:spPr>
         <p:txBody>
-          <a:bodyPr wrap="square" lIns="0" tIns="0" rIns="0" bIns="0" rtlCol="0" anchor="ctr"/>
+          <a:bodyPr wrap="none" lIns="0" tIns="0" rIns="0" bIns="0" rtlCol="0" anchor="ctr"/>
           <a:lstStyle/>
           <a:p>
             <a:pPr algn="ctr" indent="0" marL="0">
@@ -4601,7 +4601,7 @@
           <a:ln/>
         </p:spPr>
         <p:txBody>
-          <a:bodyPr wrap="square" lIns="0" tIns="0" rIns="0" bIns="0" rtlCol="0" anchor="ctr"/>
+          <a:bodyPr wrap="none" lIns="0" tIns="0" rIns="0" bIns="0" rtlCol="0" anchor="ctr"/>
           <a:lstStyle/>
           <a:p>
             <a:pPr algn="ctr" indent="0" marL="0">
@@ -4644,7 +4644,7 @@
           <a:ln/>
         </p:spPr>
         <p:txBody>
-          <a:bodyPr wrap="square" lIns="0" tIns="0" rIns="0" bIns="0" rtlCol="0" anchor="ctr"/>
+          <a:bodyPr wrap="none" lIns="0" tIns="0" rIns="0" bIns="0" rtlCol="0" anchor="ctr"/>
           <a:lstStyle/>
           <a:p>
             <a:pPr algn="ctr" indent="0" marL="0">
@@ -4687,7 +4687,7 @@
           <a:ln/>
         </p:spPr>
         <p:txBody>
-          <a:bodyPr wrap="square" lIns="0" tIns="0" rIns="0" bIns="0" rtlCol="0" anchor="ctr"/>
+          <a:bodyPr wrap="none" lIns="0" tIns="0" rIns="0" bIns="0" rtlCol="0" anchor="ctr"/>
           <a:lstStyle/>
           <a:p>
             <a:pPr algn="ctr" indent="0" marL="0">
@@ -5533,7 +5533,7 @@
           <a:ln/>
         </p:spPr>
         <p:txBody>
-          <a:bodyPr wrap="square" lIns="0" tIns="0" rIns="0" bIns="0" rtlCol="0" anchor="ctr"/>
+          <a:bodyPr wrap="none" lIns="0" tIns="0" rIns="0" bIns="0" rtlCol="0" anchor="ctr"/>
           <a:lstStyle/>
           <a:p>
             <a:pPr algn="ctr" indent="0" marL="0">
@@ -5576,7 +5576,7 @@
           <a:ln/>
         </p:spPr>
         <p:txBody>
-          <a:bodyPr wrap="square" lIns="0" tIns="0" rIns="0" bIns="0" rtlCol="0" anchor="ctr"/>
+          <a:bodyPr wrap="none" lIns="0" tIns="0" rIns="0" bIns="0" rtlCol="0" anchor="ctr"/>
           <a:lstStyle/>
           <a:p>
             <a:pPr algn="ctr" indent="0" marL="0">
@@ -5619,7 +5619,7 @@
           <a:ln/>
         </p:spPr>
         <p:txBody>
-          <a:bodyPr wrap="square" lIns="0" tIns="0" rIns="0" bIns="0" rtlCol="0" anchor="ctr"/>
+          <a:bodyPr wrap="none" lIns="0" tIns="0" rIns="0" bIns="0" rtlCol="0" anchor="ctr"/>
           <a:lstStyle/>
           <a:p>
             <a:pPr algn="ctr" indent="0" marL="0">
@@ -5662,7 +5662,7 @@
           <a:ln/>
         </p:spPr>
         <p:txBody>
-          <a:bodyPr wrap="square" lIns="0" tIns="0" rIns="0" bIns="0" rtlCol="0" anchor="ctr"/>
+          <a:bodyPr wrap="none" lIns="0" tIns="0" rIns="0" bIns="0" rtlCol="0" anchor="ctr"/>
           <a:lstStyle/>
           <a:p>
             <a:pPr algn="ctr" indent="0" marL="0">
@@ -5705,7 +5705,7 @@
           <a:ln/>
         </p:spPr>
         <p:txBody>
-          <a:bodyPr wrap="square" lIns="0" tIns="0" rIns="0" bIns="0" rtlCol="0" anchor="ctr"/>
+          <a:bodyPr wrap="none" lIns="0" tIns="0" rIns="0" bIns="0" rtlCol="0" anchor="ctr"/>
           <a:lstStyle/>
           <a:p>
             <a:pPr algn="ctr" indent="0" marL="0">
@@ -6797,7 +6797,7 @@
           <a:ln/>
         </p:spPr>
         <p:txBody>
-          <a:bodyPr wrap="square" lIns="0" tIns="0" rIns="0" bIns="0" rtlCol="0" anchor="ctr"/>
+          <a:bodyPr wrap="none" lIns="0" tIns="0" rIns="0" bIns="0" rtlCol="0" anchor="ctr"/>
           <a:lstStyle/>
           <a:p>
             <a:pPr algn="ctr" indent="0" marL="0">
@@ -6840,7 +6840,7 @@
           <a:ln/>
         </p:spPr>
         <p:txBody>
-          <a:bodyPr wrap="square" lIns="0" tIns="0" rIns="0" bIns="0" rtlCol="0" anchor="ctr"/>
+          <a:bodyPr wrap="none" lIns="0" tIns="0" rIns="0" bIns="0" rtlCol="0" anchor="ctr"/>
           <a:lstStyle/>
           <a:p>
             <a:pPr algn="ctr" indent="0" marL="0">
@@ -6883,7 +6883,7 @@
           <a:ln/>
         </p:spPr>
         <p:txBody>
-          <a:bodyPr wrap="square" lIns="0" tIns="0" rIns="0" bIns="0" rtlCol="0" anchor="ctr"/>
+          <a:bodyPr wrap="none" lIns="0" tIns="0" rIns="0" bIns="0" rtlCol="0" anchor="ctr"/>
           <a:lstStyle/>
           <a:p>
             <a:pPr algn="ctr" indent="0" marL="0">
@@ -6926,7 +6926,7 @@
           <a:ln/>
         </p:spPr>
         <p:txBody>
-          <a:bodyPr wrap="square" lIns="0" tIns="0" rIns="0" bIns="0" rtlCol="0" anchor="ctr"/>
+          <a:bodyPr wrap="none" lIns="0" tIns="0" rIns="0" bIns="0" rtlCol="0" anchor="ctr"/>
           <a:lstStyle/>
           <a:p>
             <a:pPr algn="ctr" indent="0" marL="0">
@@ -6969,7 +6969,7 @@
           <a:ln/>
         </p:spPr>
         <p:txBody>
-          <a:bodyPr wrap="square" lIns="0" tIns="0" rIns="0" bIns="0" rtlCol="0" anchor="ctr"/>
+          <a:bodyPr wrap="none" lIns="0" tIns="0" rIns="0" bIns="0" rtlCol="0" anchor="ctr"/>
           <a:lstStyle/>
           <a:p>
             <a:pPr algn="ctr" indent="0" marL="0">
@@ -7815,7 +7815,7 @@
           <a:ln/>
         </p:spPr>
         <p:txBody>
-          <a:bodyPr wrap="square" lIns="0" tIns="0" rIns="0" bIns="0" rtlCol="0" anchor="ctr"/>
+          <a:bodyPr wrap="none" lIns="0" tIns="0" rIns="0" bIns="0" rtlCol="0" anchor="ctr"/>
           <a:lstStyle/>
           <a:p>
             <a:pPr algn="ctr" indent="0" marL="0">
@@ -7858,7 +7858,7 @@
           <a:ln/>
         </p:spPr>
         <p:txBody>
-          <a:bodyPr wrap="square" lIns="0" tIns="0" rIns="0" bIns="0" rtlCol="0" anchor="ctr"/>
+          <a:bodyPr wrap="none" lIns="0" tIns="0" rIns="0" bIns="0" rtlCol="0" anchor="ctr"/>
           <a:lstStyle/>
           <a:p>
             <a:pPr algn="ctr" indent="0" marL="0">
@@ -7901,7 +7901,7 @@
           <a:ln/>
         </p:spPr>
         <p:txBody>
-          <a:bodyPr wrap="square" lIns="0" tIns="0" rIns="0" bIns="0" rtlCol="0" anchor="ctr"/>
+          <a:bodyPr wrap="none" lIns="0" tIns="0" rIns="0" bIns="0" rtlCol="0" anchor="ctr"/>
           <a:lstStyle/>
           <a:p>
             <a:pPr algn="ctr" indent="0" marL="0">
@@ -7944,7 +7944,7 @@
           <a:ln/>
         </p:spPr>
         <p:txBody>
-          <a:bodyPr wrap="square" lIns="0" tIns="0" rIns="0" bIns="0" rtlCol="0" anchor="ctr"/>
+          <a:bodyPr wrap="none" lIns="0" tIns="0" rIns="0" bIns="0" rtlCol="0" anchor="ctr"/>
           <a:lstStyle/>
           <a:p>
             <a:pPr algn="ctr" indent="0" marL="0">
@@ -7987,7 +7987,7 @@
           <a:ln/>
         </p:spPr>
         <p:txBody>
-          <a:bodyPr wrap="square" lIns="0" tIns="0" rIns="0" bIns="0" rtlCol="0" anchor="ctr"/>
+          <a:bodyPr wrap="none" lIns="0" tIns="0" rIns="0" bIns="0" rtlCol="0" anchor="ctr"/>
           <a:lstStyle/>
           <a:p>
             <a:pPr algn="ctr" indent="0" marL="0">
@@ -9464,7 +9464,7 @@
           <a:ln/>
         </p:spPr>
         <p:txBody>
-          <a:bodyPr wrap="square" lIns="0" tIns="0" rIns="0" bIns="0" rtlCol="0" anchor="ctr"/>
+          <a:bodyPr wrap="none" lIns="0" tIns="0" rIns="0" bIns="0" rtlCol="0" anchor="ctr"/>
           <a:lstStyle/>
           <a:p>
             <a:pPr algn="ctr" indent="0" marL="0">
@@ -9507,7 +9507,7 @@
           <a:ln/>
         </p:spPr>
         <p:txBody>
-          <a:bodyPr wrap="square" lIns="0" tIns="0" rIns="0" bIns="0" rtlCol="0" anchor="ctr"/>
+          <a:bodyPr wrap="none" lIns="0" tIns="0" rIns="0" bIns="0" rtlCol="0" anchor="ctr"/>
           <a:lstStyle/>
           <a:p>
             <a:pPr algn="ctr" indent="0" marL="0">
@@ -9550,7 +9550,7 @@
           <a:ln/>
         </p:spPr>
         <p:txBody>
-          <a:bodyPr wrap="square" lIns="0" tIns="0" rIns="0" bIns="0" rtlCol="0" anchor="ctr"/>
+          <a:bodyPr wrap="none" lIns="0" tIns="0" rIns="0" bIns="0" rtlCol="0" anchor="ctr"/>
           <a:lstStyle/>
           <a:p>
             <a:pPr algn="ctr" indent="0" marL="0">
@@ -9593,7 +9593,7 @@
           <a:ln/>
         </p:spPr>
         <p:txBody>
-          <a:bodyPr wrap="square" lIns="0" tIns="0" rIns="0" bIns="0" rtlCol="0" anchor="ctr"/>
+          <a:bodyPr wrap="none" lIns="0" tIns="0" rIns="0" bIns="0" rtlCol="0" anchor="ctr"/>
           <a:lstStyle/>
           <a:p>
             <a:pPr algn="ctr" indent="0" marL="0">
@@ -9636,7 +9636,7 @@
           <a:ln/>
         </p:spPr>
         <p:txBody>
-          <a:bodyPr wrap="square" lIns="0" tIns="0" rIns="0" bIns="0" rtlCol="0" anchor="ctr"/>
+          <a:bodyPr wrap="none" lIns="0" tIns="0" rIns="0" bIns="0" rtlCol="0" anchor="ctr"/>
           <a:lstStyle/>
           <a:p>
             <a:pPr algn="ctr" indent="0" marL="0">
@@ -10482,7 +10482,7 @@
           <a:ln/>
         </p:spPr>
         <p:txBody>
-          <a:bodyPr wrap="square" lIns="0" tIns="0" rIns="0" bIns="0" rtlCol="0" anchor="ctr"/>
+          <a:bodyPr wrap="none" lIns="0" tIns="0" rIns="0" bIns="0" rtlCol="0" anchor="ctr"/>
           <a:lstStyle/>
           <a:p>
             <a:pPr algn="ctr" indent="0" marL="0">
@@ -10525,7 +10525,7 @@
           <a:ln/>
         </p:spPr>
         <p:txBody>
-          <a:bodyPr wrap="square" lIns="0" tIns="0" rIns="0" bIns="0" rtlCol="0" anchor="ctr"/>
+          <a:bodyPr wrap="none" lIns="0" tIns="0" rIns="0" bIns="0" rtlCol="0" anchor="ctr"/>
           <a:lstStyle/>
           <a:p>
             <a:pPr algn="ctr" indent="0" marL="0">
@@ -10568,7 +10568,7 @@
           <a:ln/>
         </p:spPr>
         <p:txBody>
-          <a:bodyPr wrap="square" lIns="0" tIns="0" rIns="0" bIns="0" rtlCol="0" anchor="ctr"/>
+          <a:bodyPr wrap="none" lIns="0" tIns="0" rIns="0" bIns="0" rtlCol="0" anchor="ctr"/>
           <a:lstStyle/>
           <a:p>
             <a:pPr algn="ctr" indent="0" marL="0">
@@ -10611,7 +10611,7 @@
           <a:ln/>
         </p:spPr>
         <p:txBody>
-          <a:bodyPr wrap="square" lIns="0" tIns="0" rIns="0" bIns="0" rtlCol="0" anchor="ctr"/>
+          <a:bodyPr wrap="none" lIns="0" tIns="0" rIns="0" bIns="0" rtlCol="0" anchor="ctr"/>
           <a:lstStyle/>
           <a:p>
             <a:pPr algn="ctr" indent="0" marL="0">
@@ -10654,7 +10654,7 @@
           <a:ln/>
         </p:spPr>
         <p:txBody>
-          <a:bodyPr wrap="square" lIns="0" tIns="0" rIns="0" bIns="0" rtlCol="0" anchor="ctr"/>
+          <a:bodyPr wrap="none" lIns="0" tIns="0" rIns="0" bIns="0" rtlCol="0" anchor="ctr"/>
           <a:lstStyle/>
           <a:p>
             <a:pPr algn="ctr" indent="0" marL="0">
@@ -11699,7 +11699,7 @@
           <a:ln/>
         </p:spPr>
         <p:txBody>
-          <a:bodyPr wrap="square" lIns="0" tIns="0" rIns="0" bIns="0" rtlCol="0" anchor="ctr"/>
+          <a:bodyPr wrap="none" lIns="0" tIns="0" rIns="0" bIns="0" rtlCol="0" anchor="ctr"/>
           <a:lstStyle/>
           <a:p>
             <a:pPr algn="ctr" indent="0" marL="0">
@@ -11742,7 +11742,7 @@
           <a:ln/>
         </p:spPr>
         <p:txBody>
-          <a:bodyPr wrap="square" lIns="0" tIns="0" rIns="0" bIns="0" rtlCol="0" anchor="ctr"/>
+          <a:bodyPr wrap="none" lIns="0" tIns="0" rIns="0" bIns="0" rtlCol="0" anchor="ctr"/>
           <a:lstStyle/>
           <a:p>
             <a:pPr algn="ctr" indent="0" marL="0">
@@ -11785,7 +11785,7 @@
           <a:ln/>
         </p:spPr>
         <p:txBody>
-          <a:bodyPr wrap="square" lIns="0" tIns="0" rIns="0" bIns="0" rtlCol="0" anchor="ctr"/>
+          <a:bodyPr wrap="none" lIns="0" tIns="0" rIns="0" bIns="0" rtlCol="0" anchor="ctr"/>
           <a:lstStyle/>
           <a:p>
             <a:pPr algn="ctr" indent="0" marL="0">
@@ -11828,7 +11828,7 @@
           <a:ln/>
         </p:spPr>
         <p:txBody>
-          <a:bodyPr wrap="square" lIns="0" tIns="0" rIns="0" bIns="0" rtlCol="0" anchor="ctr"/>
+          <a:bodyPr wrap="none" lIns="0" tIns="0" rIns="0" bIns="0" rtlCol="0" anchor="ctr"/>
           <a:lstStyle/>
           <a:p>
             <a:pPr algn="ctr" indent="0" marL="0">
@@ -11871,7 +11871,7 @@
           <a:ln/>
         </p:spPr>
         <p:txBody>
-          <a:bodyPr wrap="square" lIns="0" tIns="0" rIns="0" bIns="0" rtlCol="0" anchor="ctr"/>
+          <a:bodyPr wrap="none" lIns="0" tIns="0" rIns="0" bIns="0" rtlCol="0" anchor="ctr"/>
           <a:lstStyle/>
           <a:p>
             <a:pPr algn="ctr" indent="0" marL="0">
